--- a/media/resources/files/Onduktar_Koboytuu1234.pptx
+++ b/media/resources/files/Onduktar_Koboytuu1234.pptx
@@ -4210,7 +4210,7 @@
                 <a:ea typeface="+mn-ea"/>
                 <a:cs typeface="+mn-cs"/>
               </a:rPr>
-              <a:t>Турдуу пикирлер учун ыраазычылык билдиребиз.</a:t>
+              <a:t>Түрдүү пикирлер үчүн ыраазычылык билдиребиз.</a:t>
             </a:r>
           </a:p>
           <a:p>

--- a/media/resources/files/Onduktar_Koboytuu1234.pptx
+++ b/media/resources/files/Onduktar_Koboytuu1234.pptx
@@ -2388,7 +2388,7 @@
             <a:pPr algn="ctr"/>
             <a:r>
               <a:rPr lang="en-GB" sz="2000" dirty="0"/>
-              <a:t>5 × 0.3</a:t>
+              <a:t>5 × 0,3</a:t>
             </a:r>
           </a:p>
         </p:txBody>
@@ -2619,7 +2619,7 @@
             <a:pPr algn="ctr"/>
             <a:r>
               <a:rPr lang="en-GB" sz="2000" dirty="0"/>
-              <a:t>2.4 × 0.4</a:t>
+              <a:t>2,4 × 0,4</a:t>
             </a:r>
           </a:p>
         </p:txBody>
@@ -2694,7 +2694,7 @@
             <a:pPr algn="ctr"/>
             <a:r>
               <a:rPr lang="en-GB" sz="2000" dirty="0"/>
-              <a:t>1.8 × 1.3</a:t>
+              <a:t>1,8 × 1,3</a:t>
             </a:r>
           </a:p>
         </p:txBody>
@@ -2769,7 +2769,7 @@
             <a:pPr algn="ctr"/>
             <a:r>
               <a:rPr lang="en-GB" sz="2000" dirty="0"/>
-              <a:t>0.42 × 5.8</a:t>
+              <a:t>0,42 × 5,8</a:t>
             </a:r>
           </a:p>
         </p:txBody>
@@ -2968,7 +2968,7 @@
             <a:pPr algn="ctr"/>
             <a:r>
               <a:rPr lang="en-GB" sz="2000" dirty="0"/>
-              <a:t>5 × 0.3</a:t>
+              <a:t>5 × 0,3</a:t>
             </a:r>
           </a:p>
         </p:txBody>
@@ -3208,7 +3208,7 @@
             <a:pPr algn="just"/>
             <a:r>
               <a:rPr lang="en-GB" sz="2000" dirty="0"/>
-              <a:t>1.5</a:t>
+              <a:t>1,5</a:t>
             </a:r>
           </a:p>
         </p:txBody>
@@ -3244,7 +3244,7 @@
             <a:pPr algn="ctr"/>
             <a:r>
               <a:rPr lang="en-GB" sz="2000" dirty="0"/>
-              <a:t>2.4 × 0.4</a:t>
+              <a:t>2,4 × 0,4</a:t>
             </a:r>
           </a:p>
         </p:txBody>
@@ -3328,7 +3328,7 @@
             <a:pPr algn="just"/>
             <a:r>
               <a:rPr lang="en-GB" sz="2000" dirty="0"/>
-              <a:t>0.96</a:t>
+              <a:t>0,96</a:t>
             </a:r>
           </a:p>
         </p:txBody>
@@ -3364,7 +3364,7 @@
             <a:pPr algn="ctr"/>
             <a:r>
               <a:rPr lang="en-GB" sz="2000" dirty="0"/>
-              <a:t>1.8 × 1.3</a:t>
+              <a:t>1,8 × 1,3</a:t>
             </a:r>
           </a:p>
         </p:txBody>
@@ -3448,7 +3448,7 @@
             <a:pPr algn="just"/>
             <a:r>
               <a:rPr lang="en-GB" sz="2000" dirty="0"/>
-              <a:t>2.34</a:t>
+              <a:t>2,34</a:t>
             </a:r>
           </a:p>
         </p:txBody>
@@ -3484,7 +3484,7 @@
             <a:pPr algn="ctr"/>
             <a:r>
               <a:rPr lang="en-GB" sz="2000" dirty="0"/>
-              <a:t>0.42 × 5.8</a:t>
+              <a:t>0,42 × 5,8</a:t>
             </a:r>
           </a:p>
         </p:txBody>
@@ -3568,7 +3568,7 @@
             <a:pPr algn="just"/>
             <a:r>
               <a:rPr lang="en-GB" sz="2000" dirty="0"/>
-              <a:t>2.436</a:t>
+              <a:t>2,436</a:t>
             </a:r>
           </a:p>
         </p:txBody>
